--- a/images/conseptual figure.pptx
+++ b/images/conseptual figure.pptx
@@ -1,6 +1,6 @@
 
 <file path=ppt/presentation.xml><?xml version="1.0" encoding="utf-8"?>
-<p:presentation xmlns:a="http://schemas.openxmlformats.org/drawingml/2006/main" xmlns:r="http://schemas.openxmlformats.org/officeDocument/2006/relationships" xmlns:p="http://schemas.openxmlformats.org/presentationml/2006/main" saveSubsetFonts="1">
+<p:presentation xmlns:a="http://schemas.openxmlformats.org/drawingml/2006/main" xmlns:r="http://schemas.openxmlformats.org/officeDocument/2006/relationships" xmlns:p="http://schemas.openxmlformats.org/presentationml/2006/main" saveSubsetFonts="1" autoCompressPictures="0">
   <p:sldMasterIdLst>
     <p:sldMasterId id="2147483684" r:id="rId1"/>
   </p:sldMasterIdLst>
@@ -254,7 +254,7 @@
           <a:p>
             <a:fld id="{71892F44-3777-477F-80B4-4D64DFD1DB0C}" type="datetimeFigureOut">
               <a:rPr lang="nb-NO" smtClean="0"/>
-              <a:t>09.04.2024</a:t>
+              <a:t>30.06.2025</a:t>
             </a:fld>
             <a:endParaRPr lang="nb-NO"/>
           </a:p>
@@ -424,7 +424,7 @@
           <a:p>
             <a:fld id="{71892F44-3777-477F-80B4-4D64DFD1DB0C}" type="datetimeFigureOut">
               <a:rPr lang="nb-NO" smtClean="0"/>
-              <a:t>09.04.2024</a:t>
+              <a:t>30.06.2025</a:t>
             </a:fld>
             <a:endParaRPr lang="nb-NO"/>
           </a:p>
@@ -604,7 +604,7 @@
           <a:p>
             <a:fld id="{71892F44-3777-477F-80B4-4D64DFD1DB0C}" type="datetimeFigureOut">
               <a:rPr lang="nb-NO" smtClean="0"/>
-              <a:t>09.04.2024</a:t>
+              <a:t>30.06.2025</a:t>
             </a:fld>
             <a:endParaRPr lang="nb-NO"/>
           </a:p>
@@ -774,7 +774,7 @@
           <a:p>
             <a:fld id="{71892F44-3777-477F-80B4-4D64DFD1DB0C}" type="datetimeFigureOut">
               <a:rPr lang="nb-NO" smtClean="0"/>
-              <a:t>09.04.2024</a:t>
+              <a:t>30.06.2025</a:t>
             </a:fld>
             <a:endParaRPr lang="nb-NO"/>
           </a:p>
@@ -1018,7 +1018,7 @@
           <a:p>
             <a:fld id="{71892F44-3777-477F-80B4-4D64DFD1DB0C}" type="datetimeFigureOut">
               <a:rPr lang="nb-NO" smtClean="0"/>
-              <a:t>09.04.2024</a:t>
+              <a:t>30.06.2025</a:t>
             </a:fld>
             <a:endParaRPr lang="nb-NO"/>
           </a:p>
@@ -1250,7 +1250,7 @@
           <a:p>
             <a:fld id="{71892F44-3777-477F-80B4-4D64DFD1DB0C}" type="datetimeFigureOut">
               <a:rPr lang="nb-NO" smtClean="0"/>
-              <a:t>09.04.2024</a:t>
+              <a:t>30.06.2025</a:t>
             </a:fld>
             <a:endParaRPr lang="nb-NO"/>
           </a:p>
@@ -1617,7 +1617,7 @@
           <a:p>
             <a:fld id="{71892F44-3777-477F-80B4-4D64DFD1DB0C}" type="datetimeFigureOut">
               <a:rPr lang="nb-NO" smtClean="0"/>
-              <a:t>09.04.2024</a:t>
+              <a:t>30.06.2025</a:t>
             </a:fld>
             <a:endParaRPr lang="nb-NO"/>
           </a:p>
@@ -1735,7 +1735,7 @@
           <a:p>
             <a:fld id="{71892F44-3777-477F-80B4-4D64DFD1DB0C}" type="datetimeFigureOut">
               <a:rPr lang="nb-NO" smtClean="0"/>
-              <a:t>09.04.2024</a:t>
+              <a:t>30.06.2025</a:t>
             </a:fld>
             <a:endParaRPr lang="nb-NO"/>
           </a:p>
@@ -1830,7 +1830,7 @@
           <a:p>
             <a:fld id="{71892F44-3777-477F-80B4-4D64DFD1DB0C}" type="datetimeFigureOut">
               <a:rPr lang="nb-NO" smtClean="0"/>
-              <a:t>09.04.2024</a:t>
+              <a:t>30.06.2025</a:t>
             </a:fld>
             <a:endParaRPr lang="nb-NO"/>
           </a:p>
@@ -2107,7 +2107,7 @@
           <a:p>
             <a:fld id="{71892F44-3777-477F-80B4-4D64DFD1DB0C}" type="datetimeFigureOut">
               <a:rPr lang="nb-NO" smtClean="0"/>
-              <a:t>09.04.2024</a:t>
+              <a:t>30.06.2025</a:t>
             </a:fld>
             <a:endParaRPr lang="nb-NO"/>
           </a:p>
@@ -2364,7 +2364,7 @@
           <a:p>
             <a:fld id="{71892F44-3777-477F-80B4-4D64DFD1DB0C}" type="datetimeFigureOut">
               <a:rPr lang="nb-NO" smtClean="0"/>
-              <a:t>09.04.2024</a:t>
+              <a:t>30.06.2025</a:t>
             </a:fld>
             <a:endParaRPr lang="nb-NO"/>
           </a:p>
@@ -2577,7 +2577,7 @@
           <a:p>
             <a:fld id="{71892F44-3777-477F-80B4-4D64DFD1DB0C}" type="datetimeFigureOut">
               <a:rPr lang="nb-NO" smtClean="0"/>
-              <a:t>09.04.2024</a:t>
+              <a:t>30.06.2025</a:t>
             </a:fld>
             <a:endParaRPr lang="nb-NO"/>
           </a:p>
@@ -3089,7 +3089,7 @@
       </p:pic>
       <p:pic>
         <p:nvPicPr>
-          <p:cNvPr id="17" name="Picture 16" descr="A green and black graph&#10;&#10;Description automatically generated">
+          <p:cNvPr id="17" name="Picture 16">
             <a:extLst>
               <a:ext uri="{FF2B5EF4-FFF2-40B4-BE49-F238E27FC236}">
                 <a16:creationId xmlns:a16="http://schemas.microsoft.com/office/drawing/2014/main" id="{2FCA98E8-7CF6-AB5F-BB76-4601782B58CB}"/>
@@ -3109,14 +3109,13 @@
               </a:ext>
             </a:extLst>
           </a:blip>
-          <a:stretch>
-            <a:fillRect/>
-          </a:stretch>
+          <a:srcRect/>
+          <a:stretch/>
         </p:blipFill>
         <p:spPr>
           <a:xfrm>
-            <a:off x="4081811" y="3582046"/>
-            <a:ext cx="4913929" cy="3275954"/>
+            <a:off x="4081811" y="3582047"/>
+            <a:ext cx="4913929" cy="3275952"/>
           </a:xfrm>
           <a:prstGeom prst="rect">
             <a:avLst/>
@@ -3443,7 +3442,7 @@
         </p:nvSpPr>
         <p:spPr>
           <a:xfrm>
-            <a:off x="4378438" y="3642114"/>
+            <a:off x="4006963" y="3518289"/>
             <a:ext cx="563358" cy="584775"/>
           </a:xfrm>
           <a:prstGeom prst="rect">
@@ -3525,6 +3524,52 @@
               <a:rPr lang="nb-NO" sz="3200" dirty="0"/>
               <a:t>A</a:t>
             </a:r>
+          </a:p>
+        </p:txBody>
+      </p:sp>
+      <p:sp>
+        <p:nvSpPr>
+          <p:cNvPr id="2" name="Arrow: Right 1">
+            <a:extLst>
+              <a:ext uri="{FF2B5EF4-FFF2-40B4-BE49-F238E27FC236}">
+                <a16:creationId xmlns:a16="http://schemas.microsoft.com/office/drawing/2014/main" id="{5AC920A2-24DE-96A8-6721-07B25982C953}"/>
+              </a:ext>
+            </a:extLst>
+          </p:cNvPr>
+          <p:cNvSpPr/>
+          <p:nvPr/>
+        </p:nvSpPr>
+        <p:spPr>
+          <a:xfrm>
+            <a:off x="3325936" y="1572917"/>
+            <a:ext cx="643627" cy="731112"/>
+          </a:xfrm>
+          <a:prstGeom prst="rightArrow">
+            <a:avLst/>
+          </a:prstGeom>
+        </p:spPr>
+        <p:style>
+          <a:lnRef idx="2">
+            <a:schemeClr val="accent3">
+              <a:shade val="15000"/>
+            </a:schemeClr>
+          </a:lnRef>
+          <a:fillRef idx="1">
+            <a:schemeClr val="accent3"/>
+          </a:fillRef>
+          <a:effectRef idx="0">
+            <a:schemeClr val="accent3"/>
+          </a:effectRef>
+          <a:fontRef idx="minor">
+            <a:schemeClr val="lt1"/>
+          </a:fontRef>
+        </p:style>
+        <p:txBody>
+          <a:bodyPr rtlCol="0" anchor="ctr"/>
+          <a:lstStyle/>
+          <a:p>
+            <a:pPr algn="ctr"/>
+            <a:endParaRPr lang="nb-NO"/>
           </a:p>
         </p:txBody>
       </p:sp>
